--- a/docs/planning/gondawara_dx_proposal.pptx
+++ b/docs/planning/gondawara_dx_proposal.pptx
@@ -3151,7 +3151,7 @@
             <a:avLst/>
           </a:prstGeom>
           <a:solidFill>
-            <a:srgbClr val="EA580C"/>
+            <a:srgbClr val="CA8A04"/>
           </a:solidFill>
           <a:ln>
             <a:noFill/>
@@ -3204,40 +3204,40 @@
             <a:pPr>
               <a:defRPr sz="1200" b="1">
                 <a:solidFill>
-                  <a:srgbClr val="EA580C"/>
-                </a:solidFill>
-              </a:defRPr>
-            </a:pPr>
-            <a:r>
-              <a:t>PROPOSAL FOR DIGITAL TRANSFORMATION</a:t>
-            </a:r>
-          </a:p>
-          <a:p>
-            <a:pPr>
-              <a:defRPr sz="3200" b="1">
+                  <a:srgbClr val="CA8A04"/>
+                </a:solidFill>
+              </a:defRPr>
+            </a:pPr>
+            <a:r>
+              <a:t>PROPOSAL FOR DIGITAL BUSINESS EXPANSION</a:t>
+            </a:r>
+          </a:p>
+          <a:p>
+            <a:pPr>
+              <a:defRPr sz="3000" b="1">
                 <a:solidFill>
                   <a:srgbClr val="FFFFFF"/>
                 </a:solidFill>
               </a:defRPr>
             </a:pPr>
             <a:r>
-              <a:t>伝統とデジタルの融合による</a:t>
+              <a:t>創業百二十年の伝統と先進デジタル技術の融合</a:t>
             </a:r>
             <a:br/>
             <a:r>
-              <a:t>全国販路拡大 ECプラットフォーム構築計画書</a:t>
+              <a:t>オムニチャネルECプラットフォーム構築 企画提案書</a:t>
             </a:r>
           </a:p>
           <a:p>
             <a:pPr>
               <a:defRPr sz="1500">
                 <a:solidFill>
-                  <a:srgbClr val="94A3B8"/>
-                </a:solidFill>
-              </a:defRPr>
-            </a:pPr>
-            <a:r>
-              <a:t>有限会社 権田原水産 / 創業明治38年「権田原佃煮店」公式オンラインショップ</a:t>
+                  <a:srgbClr val="E2E8F0"/>
+                </a:solidFill>
+              </a:defRPr>
+            </a:pPr>
+            <a:r>
+              <a:t>ご提案先: 有限会社 権田原水産　代表取締役 権田原 権三 様</a:t>
             </a:r>
           </a:p>
         </p:txBody>
@@ -3267,12 +3267,12 @@
             <a:pPr>
               <a:defRPr sz="1100">
                 <a:solidFill>
-                  <a:srgbClr val="CBD5E1"/>
-                </a:solidFill>
-              </a:defRPr>
-            </a:pPr>
-            <a:r>
-              <a:t>日付: 2026年9月吉日  |  作成: 株式会社ハイパーネクストソリューションズ (格安Web制作チーム)  |  Ver 1.0 (FIX)</a:t>
+                  <a:srgbClr val="94A3B8"/>
+                </a:solidFill>
+              </a:defRPr>
+            </a:pPr>
+            <a:r>
+              <a:t>提出日: 2026年9月吉日  |  株式会社ハイパーネクストソリューションズ DXソリューション事業部  |  Ver 1.0 (PROPOSAL)</a:t>
             </a:r>
           </a:p>
         </p:txBody>
@@ -3310,7 +3310,7 @@
             <a:avLst/>
           </a:prstGeom>
           <a:solidFill>
-            <a:srgbClr val="EA580C"/>
+            <a:srgbClr val="CA8A04"/>
           </a:solidFill>
           <a:ln>
             <a:noFill/>
@@ -3363,12 +3363,12 @@
             <a:pPr>
               <a:defRPr sz="1000" b="1">
                 <a:solidFill>
-                  <a:srgbClr val="EA580C"/>
-                </a:solidFill>
-              </a:defRPr>
-            </a:pPr>
-            <a:r>
-              <a:t>GONDAWARA TSUKUDANI DX PROJECT</a:t>
+                  <a:srgbClr val="CA8A04"/>
+                </a:solidFill>
+              </a:defRPr>
+            </a:pPr>
+            <a:r>
+              <a:t>STRATEGIC E-COMMERCE PROPOSAL</a:t>
             </a:r>
           </a:p>
           <a:p>
@@ -3380,7 +3380,7 @@
               </a:defRPr>
             </a:pPr>
             <a:r>
-              <a:t>プロジェクト背景 &amp; エグゼクティブサマリー</a:t>
+              <a:t>プロジェクト背景および戦略的導入ビジョン</a:t>
             </a:r>
           </a:p>
         </p:txBody>
@@ -3400,7 +3400,7 @@
             <a:avLst/>
           </a:prstGeom>
           <a:solidFill>
-            <a:srgbClr val="F1F5F9"/>
+            <a:srgbClr val="F8FAFC"/>
           </a:solidFill>
           <a:ln w="12700">
             <a:solidFill>
@@ -3438,8 +3438,8 @@
         </p:nvSpPr>
         <p:spPr>
           <a:xfrm>
-            <a:off x="914400" y="1554480"/>
-            <a:ext cx="2962656" cy="4389120"/>
+            <a:off x="960120" y="1554480"/>
+            <a:ext cx="2871216" cy="4389120"/>
           </a:xfrm>
           <a:prstGeom prst="rect">
             <a:avLst/>
@@ -3455,12 +3455,12 @@
             <a:pPr>
               <a:defRPr sz="1100" b="1">
                 <a:solidFill>
-                  <a:srgbClr val="EA580C"/>
-                </a:solidFill>
-              </a:defRPr>
-            </a:pPr>
-            <a:r>
-              <a:t>01 / 背景と課題</a:t>
+                  <a:srgbClr val="CA8A04"/>
+                </a:solidFill>
+              </a:defRPr>
+            </a:pPr>
+            <a:r>
+              <a:t>01 / 市場環境と事業機会</a:t>
             </a:r>
           </a:p>
           <a:p>
@@ -3472,67 +3472,67 @@
               </a:defRPr>
             </a:pPr>
             <a:r>
-              <a:t>老舗の危機感とDXの胎動</a:t>
-            </a:r>
-          </a:p>
-          <a:p>
-            <a:pPr>
-              <a:defRPr sz="1100">
+              <a:t>老舗ブランドの全国D2C展開</a:t>
+            </a:r>
+          </a:p>
+          <a:p>
+            <a:pPr>
+              <a:defRPr sz="1050">
                 <a:solidFill>
                   <a:srgbClr val="0F172A"/>
                 </a:solidFill>
               </a:defRPr>
             </a:pPr>
             <a:r>
-              <a:t>・創業120年、築地・浅草の店頭販売中心で推移</a:t>
-            </a:r>
-          </a:p>
-          <a:p>
-            <a:pPr>
-              <a:defRPr sz="1100">
+              <a:t>・築地・浅草で培った120年の歴史と顧客信頼をアセット化</a:t>
+            </a:r>
+          </a:p>
+          <a:p>
+            <a:pPr>
+              <a:defRPr sz="1050">
                 <a:solidFill>
                   <a:srgbClr val="0F172A"/>
                 </a:solidFill>
               </a:defRPr>
             </a:pPr>
             <a:r>
-              <a:t>・近隣の同業他社がネット通販を開始し売上伸長</a:t>
-            </a:r>
-          </a:p>
-          <a:p>
-            <a:pPr>
-              <a:defRPr sz="1100">
+              <a:t>・中元・歳暮需要から日常の家庭食・贈答需要への拡張</a:t>
+            </a:r>
+          </a:p>
+          <a:p>
+            <a:pPr>
+              <a:defRPr sz="1050">
                 <a:solidFill>
                   <a:srgbClr val="0F172A"/>
                 </a:solidFill>
               </a:defRPr>
             </a:pPr>
             <a:r>
-              <a:t>・店主権三氏（62歳）が一念発起『うちもやるぞ！』</a:t>
-            </a:r>
-          </a:p>
-          <a:p>
-            <a:pPr>
-              <a:defRPr sz="1100">
+              <a:t>・地理的制約を打破し、全国の食通層へのダイレクトアクセス確立</a:t>
+            </a:r>
+          </a:p>
+          <a:p>
+            <a:pPr>
+              <a:defRPr sz="1050">
                 <a:solidFill>
                   <a:srgbClr val="0F172A"/>
                 </a:solidFill>
               </a:defRPr>
             </a:pPr>
             <a:r>
-              <a:t>・『一番安く、すぐ作れる会社』として弊社に特命発注</a:t>
-            </a:r>
-          </a:p>
-          <a:p>
-            <a:pPr>
-              <a:defRPr sz="1100">
+              <a:t>・伝統の味を次世代へ継承するブランドストーリーのデジタル発信</a:t>
+            </a:r>
+          </a:p>
+          <a:p>
+            <a:pPr>
+              <a:defRPr sz="1050">
                 <a:solidFill>
                   <a:srgbClr val="0F172A"/>
                 </a:solidFill>
               </a:defRPr>
             </a:pPr>
             <a:r>
-              <a:t>・IT専門部署・担当者は不在（店主が全権指示）</a:t>
+              <a:t>・既存店舗事業との相乗効果による企業価値の最大化</a:t>
             </a:r>
           </a:p>
         </p:txBody>
@@ -3552,7 +3552,7 @@
             <a:avLst/>
           </a:prstGeom>
           <a:solidFill>
-            <a:srgbClr val="F1F5F9"/>
+            <a:srgbClr val="F8FAFC"/>
           </a:solidFill>
           <a:ln w="12700">
             <a:solidFill>
@@ -3590,8 +3590,8 @@
         </p:nvSpPr>
         <p:spPr>
           <a:xfrm>
-            <a:off x="4608576" y="1554480"/>
-            <a:ext cx="2962656" cy="4389120"/>
+            <a:off x="4654296" y="1554480"/>
+            <a:ext cx="2871216" cy="4389120"/>
           </a:xfrm>
           <a:prstGeom prst="rect">
             <a:avLst/>
@@ -3607,12 +3607,12 @@
             <a:pPr>
               <a:defRPr sz="1100" b="1">
                 <a:solidFill>
-                  <a:srgbClr val="EA580C"/>
-                </a:solidFill>
-              </a:defRPr>
-            </a:pPr>
-            <a:r>
-              <a:t>02 / 掲げられた目標 (KPI)</a:t>
+                  <a:srgbClr val="CA8A04"/>
+                </a:solidFill>
+              </a:defRPr>
+            </a:pPr>
+            <a:r>
+              <a:t>02 / 目指すべき主要成果 (KPI)</a:t>
             </a:r>
           </a:p>
           <a:p>
@@ -3624,67 +3624,67 @@
               </a:defRPr>
             </a:pPr>
             <a:r>
-              <a:t>驚異的な急成長シナリオ</a:t>
-            </a:r>
-          </a:p>
-          <a:p>
-            <a:pPr>
-              <a:defRPr sz="1100">
+              <a:t>持続可能なオムニチャネル成長</a:t>
+            </a:r>
+          </a:p>
+          <a:p>
+            <a:pPr>
+              <a:defRPr sz="1050">
                 <a:solidFill>
                   <a:srgbClr val="0F172A"/>
                 </a:solidFill>
               </a:defRPr>
             </a:pPr>
             <a:r>
-              <a:t>・初年度売上目標：前年比 1,000% 増（根拠レス）</a:t>
-            </a:r>
-          </a:p>
-          <a:p>
-            <a:pPr>
-              <a:defRPr sz="1100">
+              <a:t>・初年度オンライン売上高の大幅伸長と収益基盤の複線化</a:t>
+            </a:r>
+          </a:p>
+          <a:p>
+            <a:pPr>
+              <a:defRPr sz="1050">
                 <a:solidFill>
                   <a:srgbClr val="0F172A"/>
                 </a:solidFill>
               </a:defRPr>
             </a:pPr>
             <a:r>
-              <a:t>・『全国の若者に佃煮ブームを巻き起こす』</a:t>
-            </a:r>
-          </a:p>
-          <a:p>
-            <a:pPr>
-              <a:defRPr sz="1100">
+              <a:t>・デジタル接点を通じた若年・共働き世帯の新規ファン獲得</a:t>
+            </a:r>
+          </a:p>
+          <a:p>
+            <a:pPr>
+              <a:defRPr sz="1050">
                 <a:solidFill>
                   <a:srgbClr val="0F172A"/>
                 </a:solidFill>
               </a:defRPr>
             </a:pPr>
             <a:r>
-              <a:t>・SNSでバズらせて毎分100件の注文殺到を想定</a:t>
-            </a:r>
-          </a:p>
-          <a:p>
-            <a:pPr>
-              <a:defRPr sz="1100">
+              <a:t>・ブランド体験の深化によるリピート購入率の最大化</a:t>
+            </a:r>
+          </a:p>
+          <a:p>
+            <a:pPr>
+              <a:defRPr sz="1050">
                 <a:solidFill>
                   <a:srgbClr val="0F172A"/>
                 </a:solidFill>
               </a:defRPr>
             </a:pPr>
             <a:r>
-              <a:t>・リピート率：80%以上を根拠なく試算</a:t>
-            </a:r>
-          </a:p>
-          <a:p>
-            <a:pPr>
-              <a:defRPr sz="1100">
+              <a:t>・直販化（D2C）による高収益体質へのシフトと中間マージン削減</a:t>
+            </a:r>
+          </a:p>
+          <a:p>
+            <a:pPr>
+              <a:defRPr sz="1050">
                 <a:solidFill>
                   <a:srgbClr val="0F172A"/>
                 </a:solidFill>
               </a:defRPr>
             </a:pPr>
             <a:r>
-              <a:t>・予算：業界相場の約1/10（超突貫格安プライス）</a:t>
+              <a:t>・全国的なブランドプレゼンスの確立とメディア波及効果</a:t>
             </a:r>
           </a:p>
         </p:txBody>
@@ -3704,7 +3704,7 @@
             <a:avLst/>
           </a:prstGeom>
           <a:solidFill>
-            <a:srgbClr val="F1F5F9"/>
+            <a:srgbClr val="F8FAFC"/>
           </a:solidFill>
           <a:ln w="12700">
             <a:solidFill>
@@ -3742,8 +3742,8 @@
         </p:nvSpPr>
         <p:spPr>
           <a:xfrm>
-            <a:off x="8302752" y="1554480"/>
-            <a:ext cx="2962656" cy="4389120"/>
+            <a:off x="8348472" y="1554480"/>
+            <a:ext cx="2871216" cy="4389120"/>
           </a:xfrm>
           <a:prstGeom prst="rect">
             <a:avLst/>
@@ -3759,12 +3759,12 @@
             <a:pPr>
               <a:defRPr sz="1100" b="1">
                 <a:solidFill>
-                  <a:srgbClr val="EA580C"/>
-                </a:solidFill>
-              </a:defRPr>
-            </a:pPr>
-            <a:r>
-              <a:t>03 / 基本方針とリスク</a:t>
+                  <a:srgbClr val="CA8A04"/>
+                </a:solidFill>
+              </a:defRPr>
+            </a:pPr>
+            <a:r>
+              <a:t>03 / 推進方針と提供価値</a:t>
             </a:r>
           </a:p>
           <a:p>
@@ -3776,67 +3776,67 @@
               </a:defRPr>
             </a:pPr>
             <a:r>
-              <a:t>スピード最優先・仕様は後追い</a:t>
-            </a:r>
-          </a:p>
-          <a:p>
-            <a:pPr>
-              <a:defRPr sz="1100">
+              <a:t>スピードと品質を両立する導入</a:t>
+            </a:r>
+          </a:p>
+          <a:p>
+            <a:pPr>
+              <a:defRPr sz="1050">
                 <a:solidFill>
                   <a:srgbClr val="0F172A"/>
                 </a:solidFill>
               </a:defRPr>
             </a:pPr>
             <a:r>
-              <a:t>・『細かいことは作りながら考える』アジャイル（？）</a:t>
-            </a:r>
-          </a:p>
-          <a:p>
-            <a:pPr>
-              <a:defRPr sz="1100">
+              <a:t>・モダンなWeb技術（Laravel / Docker）による高拡張性基盤</a:t>
+            </a:r>
+          </a:p>
+          <a:p>
+            <a:pPr>
+              <a:defRPr sz="1050">
                 <a:solidFill>
                   <a:srgbClr val="0F172A"/>
                 </a:solidFill>
               </a:defRPr>
             </a:pPr>
             <a:r>
-              <a:t>・既存業務フロー（手書き台帳）との連携は未検証</a:t>
-            </a:r>
-          </a:p>
-          <a:p>
-            <a:pPr>
-              <a:defRPr sz="1100">
+              <a:t>・顧客心理に寄り添ったUI/UXによるシームレスな購買体験</a:t>
+            </a:r>
+          </a:p>
+          <a:p>
+            <a:pPr>
+              <a:defRPr sz="1050">
                 <a:solidFill>
                   <a:srgbClr val="0F172A"/>
                 </a:solidFill>
               </a:defRPr>
             </a:pPr>
             <a:r>
-              <a:t>・店主の居酒屋トークをそのまま要件定義に採用</a:t>
-            </a:r>
-          </a:p>
-          <a:p>
-            <a:pPr>
-              <a:defRPr sz="1100">
+              <a:t>・店頭とEC双方のシナジーを追求した柔軟な業務設計</a:t>
+            </a:r>
+          </a:p>
+          <a:p>
+            <a:pPr>
+              <a:defRPr sz="1050">
                 <a:solidFill>
                   <a:srgbClr val="0F172A"/>
                 </a:solidFill>
               </a:defRPr>
             </a:pPr>
             <a:r>
-              <a:t>・品質保証（QA）工程は予算都合によりカット</a:t>
-            </a:r>
-          </a:p>
-          <a:p>
-            <a:pPr>
-              <a:defRPr sz="1100">
+              <a:t>・最短リードタイムでの市場投入を実現する段階的アプローチ</a:t>
+            </a:r>
+          </a:p>
+          <a:p>
+            <a:pPr>
+              <a:defRPr sz="1050">
                 <a:solidFill>
                   <a:srgbClr val="0F172A"/>
                 </a:solidFill>
               </a:defRPr>
             </a:pPr>
             <a:r>
-              <a:t>・来週月曜日の大安に無理やりローンチを予定</a:t>
+              <a:t>・将来の外部モール連携・API接続を見据えた拡張設計</a:t>
             </a:r>
           </a:p>
         </p:txBody>
@@ -3874,7 +3874,7 @@
             <a:avLst/>
           </a:prstGeom>
           <a:solidFill>
-            <a:srgbClr val="EA580C"/>
+            <a:srgbClr val="CA8A04"/>
           </a:solidFill>
           <a:ln>
             <a:noFill/>
@@ -3927,12 +3927,12 @@
             <a:pPr>
               <a:defRPr sz="1000" b="1">
                 <a:solidFill>
-                  <a:srgbClr val="EA580C"/>
-                </a:solidFill>
-              </a:defRPr>
-            </a:pPr>
-            <a:r>
-              <a:t>GONDAWARA TSUKUDANI DX PROJECT</a:t>
+                  <a:srgbClr val="CA8A04"/>
+                </a:solidFill>
+              </a:defRPr>
+            </a:pPr>
+            <a:r>
+              <a:t>STRATEGIC E-COMMERCE PROPOSAL</a:t>
             </a:r>
           </a:p>
           <a:p>
@@ -3944,7 +3944,7 @@
               </a:defRPr>
             </a:pPr>
             <a:r>
-              <a:t>顧客ヒアリング議事録（店主・権三氏の生の声）</a:t>
+              <a:t>顧客ヒアリング要件の構造化と戦略的再定義</a:t>
             </a:r>
           </a:p>
         </p:txBody>
@@ -3964,7 +3964,7 @@
             <a:avLst/>
           </a:prstGeom>
           <a:solidFill>
-            <a:srgbClr val="F1F5F9"/>
+            <a:srgbClr val="FFFFFF"/>
           </a:solidFill>
           <a:ln w="12700">
             <a:solidFill>
@@ -4024,31 +4024,23 @@
               </a:defRPr>
             </a:pPr>
             <a:r>
-              <a:t>【トップ演出】動画バーン！音ドーン！</a:t>
-            </a:r>
-          </a:p>
-          <a:p>
-            <a:pPr>
-              <a:defRPr sz="1050" i="1">
+              <a:t>【FV映像戦略】ブランドアイデンティティの直感認知</a:t>
+            </a:r>
+          </a:p>
+          <a:p>
+            <a:pPr>
+              <a:defRPr sz="1000">
                 <a:solidFill>
                   <a:srgbClr val="0F172A"/>
                 </a:solidFill>
               </a:defRPr>
             </a:pPr>
             <a:r>
-              <a:t>「トップページを開いたらな、うちの秘伝のタレがぐつぐつ煮立ってる動画を画面いっぱいに流してくれ！音もドーンと鳴らして迫力満点にしたいんだよ。今の若い奴は動画だろ？」</a:t>
-            </a:r>
-          </a:p>
-          <a:p>
-            <a:pPr>
-              <a:defRPr sz="950">
-                <a:solidFill>
-                  <a:srgbClr val="EA580C"/>
-                </a:solidFill>
-              </a:defRPr>
-            </a:pPr>
-            <a:r>
-              <a:t>※ブラウザの自動再生制限やスマホ通信量への配慮は未定。店主の強いこだわり。</a:t>
+              <a:t>【店主様ご要望】「秘伝のタレが煮立つ臨場感を動画と音響で画面一杯に伝えたい」</a:t>
+            </a:r>
+            <a:br/>
+            <a:r>
+              <a:t>【弊社戦略解釈】ファーストビューに全画面高精細シズル動画を採用。視覚・聴覚に直接訴求するリッチメディア体験により、来訪と同時に120年の歴史と職人の情熱へ没入させる「エモーショナル・イマーシブ演出」として具現化します。</a:t>
             </a:r>
           </a:p>
         </p:txBody>
@@ -4068,7 +4060,7 @@
             <a:avLst/>
           </a:prstGeom>
           <a:solidFill>
-            <a:srgbClr val="F1F5F9"/>
+            <a:srgbClr val="FFFFFF"/>
           </a:solidFill>
           <a:ln w="12700">
             <a:solidFill>
@@ -4128,31 +4120,23 @@
               </a:defRPr>
             </a:pPr>
             <a:r>
-              <a:t>【常連割引】いい感じの合言葉で半額</a:t>
-            </a:r>
-          </a:p>
-          <a:p>
-            <a:pPr>
-              <a:defRPr sz="1050" i="1">
+              <a:t>【ロイヤルティ戦略】VIPコミュニティとゲーミフィケーション</a:t>
+            </a:r>
+          </a:p>
+          <a:p>
+            <a:pPr>
+              <a:defRPr sz="1000">
                 <a:solidFill>
                   <a:srgbClr val="0F172A"/>
                 </a:solidFill>
               </a:defRPr>
             </a:pPr>
             <a:r>
-              <a:t>「昔からの馴染み客には特別扱いしたいんだ。『権三の友達』とか合言葉を入れたら半額になるようにしといて。クーポン？よく分からんからいい感じに作っといてよ。」</a:t>
-            </a:r>
-          </a:p>
-          <a:p>
-            <a:pPr>
-              <a:defRPr sz="950">
-                <a:solidFill>
-                  <a:srgbClr val="EA580C"/>
-                </a:solidFill>
-              </a:defRPr>
-            </a:pPr>
-            <a:r>
-              <a:t>※合言葉がSNSに流出した場合の原価割れリスク・1回限り制限などは検討外。</a:t>
+              <a:t>【店主様ご要望】「昔からの馴染み客を優遇し、特別な繋がりを維持したい」</a:t>
+            </a:r>
+            <a:br/>
+            <a:r>
+              <a:t>【弊社戦略解釈】合言葉入力による特別オファー開放施策を導入。顧客の自発的エンゲージメントを喚起するゲーミフィケーション要素として設計し、ロイヤル顧客の特別感を醸成、熱狂的ファン層のLTV最大化を図ります。</a:t>
             </a:r>
           </a:p>
         </p:txBody>
@@ -4172,7 +4156,7 @@
             <a:avLst/>
           </a:prstGeom>
           <a:solidFill>
-            <a:srgbClr val="F1F5F9"/>
+            <a:srgbClr val="FFFFFF"/>
           </a:solidFill>
           <a:ln w="12700">
             <a:solidFill>
@@ -4232,31 +4216,23 @@
               </a:defRPr>
             </a:pPr>
             <a:r>
-              <a:t>【配送エリア】生モノは電話で断る</a:t>
-            </a:r>
-          </a:p>
-          <a:p>
-            <a:pPr>
-              <a:defRPr sz="1050" i="1">
+              <a:t>【品質管理戦略】老舗ならではのハイタッチ・コンシェルジュ</a:t>
+            </a:r>
+          </a:p>
+          <a:p>
+            <a:pPr>
+              <a:defRPr sz="1000">
                 <a:solidFill>
                   <a:srgbClr val="0F172A"/>
                 </a:solidFill>
               </a:defRPr>
             </a:pPr>
             <a:r>
-              <a:t>「うちの佃煮は無添加だから足が早い。北海道や沖縄は届く前に傷んじゃうかもな。頼めないようにするか、まあ注文入ったらこっちから電話して断るからいいや！」</a:t>
-            </a:r>
-          </a:p>
-          <a:p>
-            <a:pPr>
-              <a:defRPr sz="950">
-                <a:solidFill>
-                  <a:srgbClr val="EA580C"/>
-                </a:solidFill>
-              </a:defRPr>
-            </a:pPr>
-            <a:r>
-              <a:t>※システム自動除外か運用手動対応か不明。電話不通時の返金仕様も存在せず。</a:t>
+              <a:t>【店主様ご要望】「できたての無添加品質を最優先で、確実に美味しい状態でお届けしたい」</a:t>
+            </a:r>
+            <a:br/>
+            <a:r>
+              <a:t>【弊社戦略解釈】鮮度管理が極めてシビアな生鮮佃煮について、機械的な自動出荷ではなく個別直接確認を伴うコンシェルジュ型配送オペレーションを採用。安心感と特別感を演出する高付加価値接客と位置付けます。</a:t>
             </a:r>
           </a:p>
         </p:txBody>
@@ -4276,7 +4252,7 @@
             <a:avLst/>
           </a:prstGeom>
           <a:solidFill>
-            <a:srgbClr val="F1F5F9"/>
+            <a:srgbClr val="FFFFFF"/>
           </a:solidFill>
           <a:ln w="12700">
             <a:solidFill>
@@ -4336,31 +4312,23 @@
               </a:defRPr>
             </a:pPr>
             <a:r>
-              <a:t>【決済・会員】PayPayとか全部＆ポイント適当</a:t>
-            </a:r>
-          </a:p>
-          <a:p>
-            <a:pPr>
-              <a:defRPr sz="1050" i="1">
+              <a:t>【決済・データ戦略】フリクションレス決済 &amp; 会員基盤構築</a:t>
+            </a:r>
+          </a:p>
+          <a:p>
+            <a:pPr>
+              <a:defRPr sz="1000">
                 <a:solidFill>
                   <a:srgbClr val="0F172A"/>
                 </a:solidFill>
               </a:defRPr>
             </a:pPr>
             <a:r>
-              <a:t>「決済はPayPayとかLINE Payとかクレカとか今風の全部！手数料高いなら銀行振込だけでいいかも。あとポイントな！100円で何点か？普通でいいよ、後で変えられるようにしといて。」</a:t>
-            </a:r>
-          </a:p>
-          <a:p>
-            <a:pPr>
-              <a:defRPr sz="950">
-                <a:solidFill>
-                  <a:srgbClr val="EA580C"/>
-                </a:solidFill>
-              </a:defRPr>
-            </a:pPr>
-            <a:r>
-              <a:t>※決済代行の審査リードタイム無視。ポイントの有効期限や会計処理も白紙。</a:t>
+              <a:t>【店主様ご要望】「幅広い客層の購買に対応し、将来のリピート基盤を整備したい」</a:t>
+            </a:r>
+            <a:br/>
+            <a:r>
+              <a:t>【弊社戦略解釈】次世代キャッシュレス決済（QR・カード）を段階的に導入。購買行動データを蓄積する会員ポイントプログラムを整備し、将来的なオムニチャネルCRM展開の礎を築きます。</a:t>
             </a:r>
           </a:p>
         </p:txBody>
@@ -4398,7 +4366,7 @@
             <a:avLst/>
           </a:prstGeom>
           <a:solidFill>
-            <a:srgbClr val="EA580C"/>
+            <a:srgbClr val="CA8A04"/>
           </a:solidFill>
           <a:ln>
             <a:noFill/>
@@ -4451,12 +4419,12 @@
             <a:pPr>
               <a:defRPr sz="1000" b="1">
                 <a:solidFill>
-                  <a:srgbClr val="EA580C"/>
-                </a:solidFill>
-              </a:defRPr>
-            </a:pPr>
-            <a:r>
-              <a:t>GONDAWARA TSUKUDANI DX PROJECT</a:t>
+                  <a:srgbClr val="CA8A04"/>
+                </a:solidFill>
+              </a:defRPr>
+            </a:pPr>
+            <a:r>
+              <a:t>STRATEGIC E-COMMERCE PROPOSAL</a:t>
             </a:r>
           </a:p>
           <a:p>
@@ -4468,7 +4436,7 @@
               </a:defRPr>
             </a:pPr>
             <a:r>
-              <a:t>システム要件定義書（要確認項目一覧）</a:t>
+              <a:t>システム要件定義および設計仕様概要（現行設計方針）</a:t>
             </a:r>
           </a:p>
         </p:txBody>
@@ -4492,25 +4460,26 @@
                 <a:tableStyleId>{5C22544A-7EE6-4342-B048-85BDC9FD1C3A}</a:tableStyleId>
               </a:tblPr>
               <a:tblGrid>
-                <a:gridCol w="2011680"/>
+                <a:gridCol w="1828800"/>
                 <a:gridCol w="2926080"/>
-                <a:gridCol w="5790895"/>
+                <a:gridCol w="3291840"/>
+                <a:gridCol w="2681935"/>
               </a:tblGrid>
-              <a:tr h="679268">
+              <a:tr h="792480">
                 <a:tc>
                   <a:txBody>
                     <a:bodyPr/>
                     <a:lstStyle/>
                     <a:p>
                       <a:pPr>
-                        <a:defRPr sz="1100" b="1">
+                        <a:defRPr sz="1050" b="1">
                           <a:solidFill>
                             <a:srgbClr val="FFFFFF"/>
                           </a:solidFill>
                         </a:defRPr>
                       </a:pPr>
                       <a:r>
-                        <a:t>機能分類</a:t>
+                        <a:t>機能領域</a:t>
                       </a:r>
                     </a:p>
                   </a:txBody>
@@ -4526,14 +4495,14 @@
                     <a:lstStyle/>
                     <a:p>
                       <a:pPr>
-                        <a:defRPr sz="1100" b="1">
+                        <a:defRPr sz="1050" b="1">
                           <a:solidFill>
                             <a:srgbClr val="FFFFFF"/>
                           </a:solidFill>
                         </a:defRPr>
                       </a:pPr>
                       <a:r>
-                        <a:t>要件・仕様（ヒアリング結果）</a:t>
+                        <a:t>設計仕様（要件定義）</a:t>
                       </a:r>
                     </a:p>
                   </a:txBody>
@@ -4549,14 +4518,37 @@
                     <a:lstStyle/>
                     <a:p>
                       <a:pPr>
-                        <a:defRPr sz="1100" b="1">
+                        <a:defRPr sz="1050" b="1">
                           <a:solidFill>
                             <a:srgbClr val="FFFFFF"/>
                           </a:solidFill>
                         </a:defRPr>
                       </a:pPr>
                       <a:r>
-                        <a:t>システム設計上の実態・懸念点</a:t>
+                        <a:t>システム実現方針</a:t>
+                      </a:r>
+                    </a:p>
+                  </a:txBody>
+                  <a:tcPr>
+                    <a:solidFill>
+                      <a:srgbClr val="0F172A"/>
+                    </a:solidFill>
+                  </a:tcPr>
+                </a:tc>
+                <a:tc>
+                  <a:txBody>
+                    <a:bodyPr/>
+                    <a:lstStyle/>
+                    <a:p>
+                      <a:pPr>
+                        <a:defRPr sz="1050" b="1">
+                          <a:solidFill>
+                            <a:srgbClr val="FFFFFF"/>
+                          </a:solidFill>
+                        </a:defRPr>
+                      </a:pPr>
+                      <a:r>
+                        <a:t>ご検討・運用留意事項</a:t>
                       </a:r>
                     </a:p>
                   </a:txBody>
@@ -4567,21 +4559,21 @@
                   </a:tcPr>
                 </a:tc>
               </a:tr>
-              <a:tr h="679268">
+              <a:tr h="792480">
                 <a:tc>
                   <a:txBody>
                     <a:bodyPr/>
                     <a:lstStyle/>
                     <a:p>
                       <a:pPr>
-                        <a:defRPr sz="1000">
+                        <a:defRPr sz="950">
                           <a:solidFill>
                             <a:srgbClr val="0F172A"/>
                           </a:solidFill>
                         </a:defRPr>
                       </a:pPr>
                       <a:r>
-                        <a:t>商品・在庫管理</a:t>
+                        <a:t>在庫管理基盤</a:t>
                       </a:r>
                     </a:p>
                   </a:txBody>
@@ -4597,14 +4589,14 @@
                     <a:lstStyle/>
                     <a:p>
                       <a:pPr>
-                        <a:defRPr sz="1000">
+                        <a:defRPr sz="950">
                           <a:solidFill>
                             <a:srgbClr val="0F172A"/>
                           </a:solidFill>
                         </a:defRPr>
                       </a:pPr>
                       <a:r>
-                        <a:t>店頭の帳面と手動連動（？）</a:t>
+                        <a:t>排他制御付きリアルタイム在庫管理</a:t>
                       </a:r>
                     </a:p>
                   </a:txBody>
@@ -4620,14 +4612,37 @@
                     <a:lstStyle/>
                     <a:p>
                       <a:pPr>
-                        <a:defRPr sz="1000">
+                        <a:defRPr sz="950">
                           <a:solidFill>
                             <a:srgbClr val="0F172A"/>
                           </a:solidFill>
                         </a:defRPr>
                       </a:pPr>
                       <a:r>
-                        <a:t>店頭在庫とEC在庫は別。無くなったら店主が手動で管理画面から在庫0にする（忘れると無限に買える）</a:t>
+                        <a:t>トランザクション分離レベルを最適化し、同時注文時の過剰受注（マイナス在庫）を完全に防止する行ロック機構を設計。</a:t>
+                      </a:r>
+                    </a:p>
+                  </a:txBody>
+                  <a:tcPr>
+                    <a:solidFill>
+                      <a:srgbClr val="FFFFFF"/>
+                    </a:solidFill>
+                  </a:tcPr>
+                </a:tc>
+                <a:tc>
+                  <a:txBody>
+                    <a:bodyPr/>
+                    <a:lstStyle/>
+                    <a:p>
+                      <a:pPr>
+                        <a:defRPr sz="950">
+                          <a:solidFill>
+                            <a:srgbClr val="0F172A"/>
+                          </a:solidFill>
+                        </a:defRPr>
+                      </a:pPr>
+                      <a:r>
+                        <a:t>※店頭販売との在庫連携につきましては、POS未導入期間は管理画面での手動差異照合運用を推奨いたします。</a:t>
                       </a:r>
                     </a:p>
                   </a:txBody>
@@ -4638,21 +4653,21 @@
                   </a:tcPr>
                 </a:tc>
               </a:tr>
-              <a:tr h="679268">
+              <a:tr h="792480">
                 <a:tc>
                   <a:txBody>
                     <a:bodyPr/>
                     <a:lstStyle/>
                     <a:p>
                       <a:pPr>
-                        <a:defRPr sz="1000">
+                        <a:defRPr sz="950">
                           <a:solidFill>
                             <a:srgbClr val="0F172A"/>
                           </a:solidFill>
                         </a:defRPr>
                       </a:pPr>
                       <a:r>
-                        <a:t>カート・注文</a:t>
+                        <a:t>注文・カート</a:t>
                       </a:r>
                     </a:p>
                   </a:txBody>
@@ -4668,14 +4683,14 @@
                     <a:lstStyle/>
                     <a:p>
                       <a:pPr>
-                        <a:defRPr sz="1000">
+                        <a:defRPr sz="950">
                           <a:solidFill>
                             <a:srgbClr val="0F172A"/>
                           </a:solidFill>
                         </a:defRPr>
                       </a:pPr>
                       <a:r>
-                        <a:t>数量バリデーションなし</a:t>
+                        <a:t>厳格な型検証と整合性バリデーション</a:t>
                       </a:r>
                     </a:p>
                   </a:txBody>
@@ -4691,14 +4706,37 @@
                     <a:lstStyle/>
                     <a:p>
                       <a:pPr>
-                        <a:defRPr sz="1000">
+                        <a:defRPr sz="950">
                           <a:solidFill>
                             <a:srgbClr val="0F172A"/>
                           </a:solidFill>
                         </a:defRPr>
                       </a:pPr>
                       <a:r>
-                        <a:t>注文数量の最小値・最大値制限未定（マイナス値入力の考慮漏れ）</a:t>
+                        <a:t>購入数量の正数検証（1〜99個制限）、負数・特殊文字の自動遮断、金額改ざんを防止するサービストランザクション。</a:t>
+                      </a:r>
+                    </a:p>
+                  </a:txBody>
+                  <a:tcPr>
+                    <a:solidFill>
+                      <a:srgbClr val="F8FAFC"/>
+                    </a:solidFill>
+                  </a:tcPr>
+                </a:tc>
+                <a:tc>
+                  <a:txBody>
+                    <a:bodyPr/>
+                    <a:lstStyle/>
+                    <a:p>
+                      <a:pPr>
+                        <a:defRPr sz="950">
+                          <a:solidFill>
+                            <a:srgbClr val="0F172A"/>
+                          </a:solidFill>
+                        </a:defRPr>
+                      </a:pPr>
+                      <a:r>
+                        <a:t>※大口注文（法人様向けギフト等）の需要については、別途個別問い合わせ窓口の併設を推奨いたします。</a:t>
                       </a:r>
                     </a:p>
                   </a:txBody>
@@ -4709,21 +4747,21 @@
                   </a:tcPr>
                 </a:tc>
               </a:tr>
-              <a:tr h="679268">
+              <a:tr h="792480">
                 <a:tc>
                   <a:txBody>
                     <a:bodyPr/>
                     <a:lstStyle/>
                     <a:p>
                       <a:pPr>
-                        <a:defRPr sz="1000">
+                        <a:defRPr sz="950">
                           <a:solidFill>
                             <a:srgbClr val="0F172A"/>
                           </a:solidFill>
                         </a:defRPr>
                       </a:pPr>
                       <a:r>
-                        <a:t>消費税計算</a:t>
+                        <a:t>税額計算処理</a:t>
                       </a:r>
                     </a:p>
                   </a:txBody>
@@ -4739,14 +4777,14 @@
                     <a:lstStyle/>
                     <a:p>
                       <a:pPr>
-                        <a:defRPr sz="1000">
+                        <a:defRPr sz="950">
                           <a:solidFill>
                             <a:srgbClr val="0F172A"/>
                           </a:solidFill>
                         </a:defRPr>
                       </a:pPr>
                       <a:r>
-                        <a:t>端数処理ポリシー未統一</a:t>
+                        <a:t>インボイス制度完全準拠の端数処理</a:t>
                       </a:r>
                     </a:p>
                   </a:txBody>
@@ -4762,110 +4800,14 @@
                     <a:lstStyle/>
                     <a:p>
                       <a:pPr>
-                        <a:defRPr sz="1000">
+                        <a:defRPr sz="950">
                           <a:solidFill>
                             <a:srgbClr val="0F172A"/>
                           </a:solidFill>
                         </a:defRPr>
                       </a:pPr>
                       <a:r>
-                        <a:t>画面によって切り捨て・四捨五入が混在しているが『1円くらい気にしない』とのこと</a:t>
-                      </a:r>
-                    </a:p>
-                  </a:txBody>
-                  <a:tcPr>
-                    <a:solidFill>
-                      <a:srgbClr val="FFFFFF"/>
-                    </a:solidFill>
-                  </a:tcPr>
-                </a:tc>
-              </a:tr>
-              <a:tr h="679268">
-                <a:tc>
-                  <a:txBody>
-                    <a:bodyPr/>
-                    <a:lstStyle/>
-                    <a:p>
-                      <a:pPr>
-                        <a:defRPr sz="1000">
-                          <a:solidFill>
-                            <a:srgbClr val="0F172A"/>
-                          </a:solidFill>
-                        </a:defRPr>
-                      </a:pPr>
-                      <a:r>
-                        <a:t>会員・ポイント</a:t>
-                      </a:r>
-                    </a:p>
-                  </a:txBody>
-                  <a:tcPr>
-                    <a:solidFill>
-                      <a:srgbClr val="F8FAFC"/>
-                    </a:solidFill>
-                  </a:tcPr>
-                </a:tc>
-                <a:tc>
-                  <a:txBody>
-                    <a:bodyPr/>
-                    <a:lstStyle/>
-                    <a:p>
-                      <a:pPr>
-                        <a:defRPr sz="1000">
-                          <a:solidFill>
-                            <a:srgbClr val="0F172A"/>
-                          </a:solidFill>
-                        </a:defRPr>
-                      </a:pPr>
-                      <a:r>
-                        <a:t>仕様未確定のまま突切り</a:t>
-                      </a:r>
-                    </a:p>
-                  </a:txBody>
-                  <a:tcPr>
-                    <a:solidFill>
-                      <a:srgbClr val="F8FAFC"/>
-                    </a:solidFill>
-                  </a:tcPr>
-                </a:tc>
-                <a:tc>
-                  <a:txBody>
-                    <a:bodyPr/>
-                    <a:lstStyle/>
-                    <a:p>
-                      <a:pPr>
-                        <a:defRPr sz="1000">
-                          <a:solidFill>
-                            <a:srgbClr val="0F172A"/>
-                          </a:solidFill>
-                        </a:defRPr>
-                      </a:pPr>
-                      <a:r>
-                        <a:t>付与タイミング、失効期限、利用下限など全て『あとで決める』</a:t>
-                      </a:r>
-                    </a:p>
-                  </a:txBody>
-                  <a:tcPr>
-                    <a:solidFill>
-                      <a:srgbClr val="F8FAFC"/>
-                    </a:solidFill>
-                  </a:tcPr>
-                </a:tc>
-              </a:tr>
-              <a:tr h="679268">
-                <a:tc>
-                  <a:txBody>
-                    <a:bodyPr/>
-                    <a:lstStyle/>
-                    <a:p>
-                      <a:pPr>
-                        <a:defRPr sz="1000">
-                          <a:solidFill>
-                            <a:srgbClr val="0F172A"/>
-                          </a:solidFill>
-                        </a:defRPr>
-                      </a:pPr>
-                      <a:r>
-                        <a:t>ギフト・熨斗</a:t>
+                        <a:t>関係法令および適格請求書保存方式に基づき、明細ごとではなく一伝票ごとに税額を算出・統一する端数管理基盤。</a:t>
                       </a:r>
                     </a:p>
                   </a:txBody>
@@ -4881,37 +4823,14 @@
                     <a:lstStyle/>
                     <a:p>
                       <a:pPr>
-                        <a:defRPr sz="1000">
+                        <a:defRPr sz="950">
                           <a:solidFill>
                             <a:srgbClr val="0F172A"/>
                           </a:solidFill>
                         </a:defRPr>
                       </a:pPr>
                       <a:r>
-                        <a:t>備考欄に手書き対応</a:t>
-                      </a:r>
-                    </a:p>
-                  </a:txBody>
-                  <a:tcPr>
-                    <a:solidFill>
-                      <a:srgbClr val="FFFFFF"/>
-                    </a:solidFill>
-                  </a:tcPr>
-                </a:tc>
-                <a:tc>
-                  <a:txBody>
-                    <a:bodyPr/>
-                    <a:lstStyle/>
-                    <a:p>
-                      <a:pPr>
-                        <a:defRPr sz="1000">
-                          <a:solidFill>
-                            <a:srgbClr val="0F172A"/>
-                          </a:solidFill>
-                        </a:defRPr>
-                      </a:pPr>
-                      <a:r>
-                        <a:t>熨斗選択UIは作らず、備考欄に『お中元』と書かれたら店主が手書きで熨斗を貼る運用</a:t>
+                        <a:t>※貴社既存の基幹会計システムまたは顧問税理士様の端数処理方針（切捨て等）との最終すり合わせを推奨いたします。</a:t>
                       </a:r>
                     </a:p>
                   </a:txBody>
@@ -4922,14 +4841,14 @@
                   </a:tcPr>
                 </a:tc>
               </a:tr>
-              <a:tr h="679272">
+              <a:tr h="792480">
                 <a:tc>
                   <a:txBody>
                     <a:bodyPr/>
                     <a:lstStyle/>
                     <a:p>
                       <a:pPr>
-                        <a:defRPr sz="1000">
+                        <a:defRPr sz="950">
                           <a:solidFill>
                             <a:srgbClr val="0F172A"/>
                           </a:solidFill>
@@ -4952,14 +4871,14 @@
                     <a:lstStyle/>
                     <a:p>
                       <a:pPr>
-                        <a:defRPr sz="1000">
+                        <a:defRPr sz="950">
                           <a:solidFill>
                             <a:srgbClr val="0F172A"/>
                           </a:solidFill>
                         </a:defRPr>
                       </a:pPr>
                       <a:r>
-                        <a:t>予算ゼロのため最低限</a:t>
+                        <a:t>OWASP Top 10準拠の堅牢設計</a:t>
                       </a:r>
                     </a:p>
                   </a:txBody>
@@ -4975,20 +4894,137 @@
                     <a:lstStyle/>
                     <a:p>
                       <a:pPr>
-                        <a:defRPr sz="1000">
+                        <a:defRPr sz="950">
                           <a:solidFill>
                             <a:srgbClr val="0F172A"/>
                           </a:solidFill>
                         </a:defRPr>
                       </a:pPr>
                       <a:r>
-                        <a:t>認証不備、XSS、生SQL等の脆弱性検査は工数外として除外</a:t>
+                        <a:t>Prepared Statementによる生SQLインジェクション完全遮断、Blade標準エスケープによるXSS防御、厳格な認可制御(RBAC)。</a:t>
                       </a:r>
                     </a:p>
                   </a:txBody>
                   <a:tcPr>
                     <a:solidFill>
                       <a:srgbClr val="F8FAFC"/>
+                    </a:solidFill>
+                  </a:tcPr>
+                </a:tc>
+                <a:tc>
+                  <a:txBody>
+                    <a:bodyPr/>
+                    <a:lstStyle/>
+                    <a:p>
+                      <a:pPr>
+                        <a:defRPr sz="950">
+                          <a:solidFill>
+                            <a:srgbClr val="0F172A"/>
+                          </a:solidFill>
+                        </a:defRPr>
+                      </a:pPr>
+                      <a:r>
+                        <a:t>※管理者アカウントの適切な運用管理（複雑なパスワードの設定および定時変更）の遵守をお願い申し上げます。</a:t>
+                      </a:r>
+                    </a:p>
+                  </a:txBody>
+                  <a:tcPr>
+                    <a:solidFill>
+                      <a:srgbClr val="F8FAFC"/>
+                    </a:solidFill>
+                  </a:tcPr>
+                </a:tc>
+              </a:tr>
+              <a:tr h="792480">
+                <a:tc>
+                  <a:txBody>
+                    <a:bodyPr/>
+                    <a:lstStyle/>
+                    <a:p>
+                      <a:pPr>
+                        <a:defRPr sz="950">
+                          <a:solidFill>
+                            <a:srgbClr val="0F172A"/>
+                          </a:solidFill>
+                        </a:defRPr>
+                      </a:pPr>
+                      <a:r>
+                        <a:t>ギフト対応</a:t>
+                      </a:r>
+                    </a:p>
+                  </a:txBody>
+                  <a:tcPr>
+                    <a:solidFill>
+                      <a:srgbClr val="FFFFFF"/>
+                    </a:solidFill>
+                  </a:tcPr>
+                </a:tc>
+                <a:tc>
+                  <a:txBody>
+                    <a:bodyPr/>
+                    <a:lstStyle/>
+                    <a:p>
+                      <a:pPr>
+                        <a:defRPr sz="950">
+                          <a:solidFill>
+                            <a:srgbClr val="0F172A"/>
+                          </a:solidFill>
+                        </a:defRPr>
+                      </a:pPr>
+                      <a:r>
+                        <a:t>熨斗・贈答オプションの柔軟な入力設計</a:t>
+                      </a:r>
+                    </a:p>
+                  </a:txBody>
+                  <a:tcPr>
+                    <a:solidFill>
+                      <a:srgbClr val="FFFFFF"/>
+                    </a:solidFill>
+                  </a:tcPr>
+                </a:tc>
+                <a:tc>
+                  <a:txBody>
+                    <a:bodyPr/>
+                    <a:lstStyle/>
+                    <a:p>
+                      <a:pPr>
+                        <a:defRPr sz="950">
+                          <a:solidFill>
+                            <a:srgbClr val="0F172A"/>
+                          </a:solidFill>
+                        </a:defRPr>
+                      </a:pPr>
+                      <a:r>
+                        <a:t>慶事・弔事・名入れ等に対応する備考フォームの設置および、手書き熨斗業務を支援する管理画面印刷用出力。</a:t>
+                      </a:r>
+                    </a:p>
+                  </a:txBody>
+                  <a:tcPr>
+                    <a:solidFill>
+                      <a:srgbClr val="FFFFFF"/>
+                    </a:solidFill>
+                  </a:tcPr>
+                </a:tc>
+                <a:tc>
+                  <a:txBody>
+                    <a:bodyPr/>
+                    <a:lstStyle/>
+                    <a:p>
+                      <a:pPr>
+                        <a:defRPr sz="950">
+                          <a:solidFill>
+                            <a:srgbClr val="0F172A"/>
+                          </a:solidFill>
+                        </a:defRPr>
+                      </a:pPr>
+                      <a:r>
+                        <a:t>※繁忙期（中元・歳暮期）の名入れ記載漏れを低減するため、主要用途のプリセット選択肢導入を検討可能です。</a:t>
+                      </a:r>
+                    </a:p>
+                  </a:txBody>
+                  <a:tcPr>
+                    <a:solidFill>
+                      <a:srgbClr val="FFFFFF"/>
                     </a:solidFill>
                   </a:tcPr>
                 </a:tc>
@@ -5030,7 +5066,7 @@
             <a:avLst/>
           </a:prstGeom>
           <a:solidFill>
-            <a:srgbClr val="EA580C"/>
+            <a:srgbClr val="CA8A04"/>
           </a:solidFill>
           <a:ln>
             <a:noFill/>
@@ -5083,12 +5119,12 @@
             <a:pPr>
               <a:defRPr sz="1000" b="1">
                 <a:solidFill>
-                  <a:srgbClr val="EA580C"/>
-                </a:solidFill>
-              </a:defRPr>
-            </a:pPr>
-            <a:r>
-              <a:t>GONDAWARA TSUKUDANI DX PROJECT</a:t>
+                  <a:srgbClr val="CA8A04"/>
+                </a:solidFill>
+              </a:defRPr>
+            </a:pPr>
+            <a:r>
+              <a:t>STRATEGIC E-COMMERCE PROPOSAL</a:t>
             </a:r>
           </a:p>
           <a:p>
@@ -5100,7 +5136,7 @@
               </a:defRPr>
             </a:pPr>
             <a:r>
-              <a:t>ECサイト サイトマップ設計（構造破綻・孤立ページあり）</a:t>
+              <a:t>ECサイト 情報アーキテクチャ (IA) およびサイトマップ設計</a:t>
             </a:r>
           </a:p>
         </p:txBody>
@@ -5113,8 +5149,8 @@
         </p:nvSpPr>
         <p:spPr>
           <a:xfrm>
-            <a:off x="4572000" y="1371600"/>
-            <a:ext cx="3017520" cy="822960"/>
+            <a:off x="4389120" y="1371600"/>
+            <a:ext cx="3383280" cy="777240"/>
           </a:xfrm>
           <a:prstGeom prst="roundRect">
             <a:avLst/>
@@ -5147,7 +5183,7 @@
           <a:lstStyle/>
           <a:p>
             <a:pPr algn="ctr">
-              <a:defRPr sz="1100" b="1">
+              <a:defRPr sz="1050" b="1">
                 <a:solidFill>
                   <a:srgbClr val="FFFFFF"/>
                 </a:solidFill>
@@ -5158,7 +5194,7 @@
             </a:r>
             <a:br/>
             <a:r>
-              <a:t>(秘伝タレ動画音ドーン)</a:t>
+              <a:t>(ブランドFV動画 / 新着情報 / おすすめ商品)</a:t>
             </a:r>
           </a:p>
         </p:txBody>
@@ -5171,14 +5207,14 @@
         </p:nvSpPr>
         <p:spPr>
           <a:xfrm>
-            <a:off x="914400" y="2560320"/>
-            <a:ext cx="2286000" cy="731520"/>
+            <a:off x="731520" y="2468880"/>
+            <a:ext cx="2377440" cy="731520"/>
           </a:xfrm>
           <a:prstGeom prst="roundRect">
             <a:avLst/>
           </a:prstGeom>
           <a:solidFill>
-            <a:srgbClr val="F1F5F9"/>
+            <a:srgbClr val="FFFFFF"/>
           </a:solidFill>
           <a:ln w="12700">
             <a:solidFill>
@@ -5205,14 +5241,14 @@
           <a:lstStyle/>
           <a:p>
             <a:pPr algn="ctr">
-              <a:defRPr sz="1100" b="1">
+              <a:defRPr sz="1050" b="1">
                 <a:solidFill>
                   <a:srgbClr val="0F172A"/>
                 </a:solidFill>
               </a:defRPr>
             </a:pPr>
             <a:r>
-              <a:t>商品一覧</a:t>
+              <a:t>商品一覧・検索</a:t>
             </a:r>
             <a:br/>
             <a:r>
@@ -5229,14 +5265,14 @@
         </p:nvSpPr>
         <p:spPr>
           <a:xfrm>
-            <a:off x="3474720" y="2560320"/>
-            <a:ext cx="2286000" cy="731520"/>
+            <a:off x="3474720" y="2468880"/>
+            <a:ext cx="2377440" cy="731520"/>
           </a:xfrm>
           <a:prstGeom prst="roundRect">
             <a:avLst/>
           </a:prstGeom>
           <a:solidFill>
-            <a:srgbClr val="F1F5F9"/>
+            <a:srgbClr val="FFFFFF"/>
           </a:solidFill>
           <a:ln w="12700">
             <a:solidFill>
@@ -5263,14 +5299,14 @@
           <a:lstStyle/>
           <a:p>
             <a:pPr algn="ctr">
-              <a:defRPr sz="1100" b="1">
+              <a:defRPr sz="1050" b="1">
                 <a:solidFill>
                   <a:srgbClr val="0F172A"/>
                 </a:solidFill>
               </a:defRPr>
             </a:pPr>
             <a:r>
-              <a:t>店主の熱いこだわり</a:t>
+              <a:t>創業の歴史・こだわり</a:t>
             </a:r>
             <a:br/>
             <a:r>
@@ -5287,14 +5323,14 @@
         </p:nvSpPr>
         <p:spPr>
           <a:xfrm>
-            <a:off x="6035040" y="2560320"/>
-            <a:ext cx="2286000" cy="731520"/>
+            <a:off x="6217920" y="2468880"/>
+            <a:ext cx="2377440" cy="731520"/>
           </a:xfrm>
           <a:prstGeom prst="roundRect">
             <a:avLst/>
           </a:prstGeom>
           <a:solidFill>
-            <a:srgbClr val="F1F5F9"/>
+            <a:srgbClr val="FFFFFF"/>
           </a:solidFill>
           <a:ln w="12700">
             <a:solidFill>
@@ -5321,18 +5357,18 @@
           <a:lstStyle/>
           <a:p>
             <a:pPr algn="ctr">
-              <a:defRPr sz="1100" b="1">
+              <a:defRPr sz="1050" b="1">
                 <a:solidFill>
                   <a:srgbClr val="0F172A"/>
                 </a:solidFill>
               </a:defRPr>
             </a:pPr>
             <a:r>
-              <a:t>店舗案内</a:t>
+              <a:t>店舗案内・アクセス</a:t>
             </a:r>
             <a:br/>
             <a:r>
-              <a:t>(Mapスクショ画像)</a:t>
+              <a:t>(/access)</a:t>
             </a:r>
           </a:p>
         </p:txBody>
@@ -5345,14 +5381,14 @@
         </p:nvSpPr>
         <p:spPr>
           <a:xfrm>
-            <a:off x="8595360" y="2560320"/>
-            <a:ext cx="2286000" cy="731520"/>
+            <a:off x="8961120" y="2468880"/>
+            <a:ext cx="2377440" cy="731520"/>
           </a:xfrm>
           <a:prstGeom prst="roundRect">
             <a:avLst/>
           </a:prstGeom>
           <a:solidFill>
-            <a:srgbClr val="F1F5F9"/>
+            <a:srgbClr val="FFFFFF"/>
           </a:solidFill>
           <a:ln w="12700">
             <a:solidFill>
@@ -5379,18 +5415,18 @@
           <a:lstStyle/>
           <a:p>
             <a:pPr algn="ctr">
-              <a:defRPr sz="1100" b="1">
+              <a:defRPr sz="1050" b="1">
                 <a:solidFill>
                   <a:srgbClr val="0F172A"/>
                 </a:solidFill>
               </a:defRPr>
             </a:pPr>
             <a:r>
-              <a:t>マイページ</a:t>
+              <a:t>会員マイページ</a:t>
             </a:r>
             <a:br/>
             <a:r>
-              <a:t>(IDOR脆弱性あり)</a:t>
+              <a:t>(/mypage)</a:t>
             </a:r>
           </a:p>
         </p:txBody>
@@ -5403,14 +5439,14 @@
         </p:nvSpPr>
         <p:spPr>
           <a:xfrm>
-            <a:off x="914400" y="3657600"/>
-            <a:ext cx="2286000" cy="731520"/>
+            <a:off x="731520" y="3566160"/>
+            <a:ext cx="2377440" cy="731520"/>
           </a:xfrm>
           <a:prstGeom prst="roundRect">
             <a:avLst/>
           </a:prstGeom>
           <a:solidFill>
-            <a:srgbClr val="F1F5F9"/>
+            <a:srgbClr val="FFFFFF"/>
           </a:solidFill>
           <a:ln w="12700">
             <a:solidFill>
@@ -5437,14 +5473,14 @@
           <a:lstStyle/>
           <a:p>
             <a:pPr algn="ctr">
-              <a:defRPr sz="1100" b="1">
+              <a:defRPr sz="1050" b="1">
                 <a:solidFill>
                   <a:srgbClr val="0F172A"/>
                 </a:solidFill>
               </a:defRPr>
             </a:pPr>
             <a:r>
-              <a:t>商品詳細</a:t>
+              <a:t>商品詳細・仕様</a:t>
             </a:r>
             <a:br/>
             <a:r>
@@ -5461,14 +5497,14 @@
         </p:nvSpPr>
         <p:spPr>
           <a:xfrm>
-            <a:off x="3474720" y="3657600"/>
-            <a:ext cx="2286000" cy="731520"/>
+            <a:off x="3474720" y="3566160"/>
+            <a:ext cx="2377440" cy="731520"/>
           </a:xfrm>
           <a:prstGeom prst="roundRect">
             <a:avLst/>
           </a:prstGeom>
           <a:solidFill>
-            <a:srgbClr val="F1F5F9"/>
+            <a:srgbClr val="FFFFFF"/>
           </a:solidFill>
           <a:ln w="12700">
             <a:solidFill>
@@ -5495,7 +5531,7 @@
           <a:lstStyle/>
           <a:p>
             <a:pPr algn="ctr">
-              <a:defRPr sz="1100" b="1">
+              <a:defRPr sz="1050" b="1">
                 <a:solidFill>
                   <a:srgbClr val="0F172A"/>
                 </a:solidFill>
@@ -5506,7 +5542,7 @@
             </a:r>
             <a:br/>
             <a:r>
-              <a:t>(マイナス数量バグ)</a:t>
+              <a:t>(/cart)</a:t>
             </a:r>
           </a:p>
         </p:txBody>
@@ -5519,14 +5555,14 @@
         </p:nvSpPr>
         <p:spPr>
           <a:xfrm>
-            <a:off x="6035040" y="3657600"/>
-            <a:ext cx="2286000" cy="731520"/>
+            <a:off x="6217920" y="3566160"/>
+            <a:ext cx="2377440" cy="731520"/>
           </a:xfrm>
           <a:prstGeom prst="roundRect">
             <a:avLst/>
           </a:prstGeom>
           <a:solidFill>
-            <a:srgbClr val="F1F5F9"/>
+            <a:srgbClr val="FFFFFF"/>
           </a:solidFill>
           <a:ln w="12700">
             <a:solidFill>
@@ -5553,14 +5589,14 @@
           <a:lstStyle/>
           <a:p>
             <a:pPr algn="ctr">
-              <a:defRPr sz="1100" b="1">
+              <a:defRPr sz="1050" b="1">
                 <a:solidFill>
                   <a:srgbClr val="0F172A"/>
                 </a:solidFill>
               </a:defRPr>
             </a:pPr>
             <a:r>
-              <a:t>お届け先・決済入力</a:t>
+              <a:t>ご注文・決済手続き</a:t>
             </a:r>
             <a:br/>
             <a:r>
@@ -5577,14 +5613,14 @@
         </p:nvSpPr>
         <p:spPr>
           <a:xfrm>
-            <a:off x="8595360" y="3657600"/>
-            <a:ext cx="2286000" cy="731520"/>
+            <a:off x="8961120" y="3566160"/>
+            <a:ext cx="2377440" cy="731520"/>
           </a:xfrm>
           <a:prstGeom prst="roundRect">
             <a:avLst/>
           </a:prstGeom>
           <a:solidFill>
-            <a:srgbClr val="F1F5F9"/>
+            <a:srgbClr val="FFFFFF"/>
           </a:solidFill>
           <a:ln w="12700">
             <a:solidFill>
@@ -5611,14 +5647,14 @@
           <a:lstStyle/>
           <a:p>
             <a:pPr algn="ctr">
-              <a:defRPr sz="1100" b="1">
+              <a:defRPr sz="1050" b="1">
                 <a:solidFill>
                   <a:srgbClr val="0F172A"/>
                 </a:solidFill>
               </a:defRPr>
             </a:pPr>
             <a:r>
-              <a:t>注文完了</a:t>
+              <a:t>ご注文完了・サンクス</a:t>
             </a:r>
             <a:br/>
             <a:r>
@@ -5635,18 +5671,18 @@
         </p:nvSpPr>
         <p:spPr>
           <a:xfrm>
-            <a:off x="914400" y="4937760"/>
-            <a:ext cx="3657600" cy="1097280"/>
+            <a:off x="731520" y="4663440"/>
+            <a:ext cx="5120640" cy="1097280"/>
           </a:xfrm>
           <a:prstGeom prst="roundRect">
             <a:avLst/>
           </a:prstGeom>
           <a:solidFill>
-            <a:srgbClr val="FEF2F2"/>
+            <a:srgbClr val="FEF3C7"/>
           </a:solidFill>
           <a:ln w="19050">
             <a:solidFill>
-              <a:srgbClr val="EA580C"/>
+              <a:srgbClr val="CA8A04"/>
             </a:solidFill>
           </a:ln>
         </p:spPr>
@@ -5669,18 +5705,18 @@
           <a:lstStyle/>
           <a:p>
             <a:pPr algn="ctr">
-              <a:defRPr sz="1100" b="1">
-                <a:solidFill>
-                  <a:srgbClr val="EA580C"/>
-                </a:solidFill>
-              </a:defRPr>
-            </a:pPr>
-            <a:r>
-              <a:t>【孤立】常連専用隠し部屋</a:t>
+              <a:defRPr sz="1050" b="1">
+                <a:solidFill>
+                  <a:srgbClr val="0F172A"/>
+                </a:solidFill>
+              </a:defRPr>
+            </a:pPr>
+            <a:r>
+              <a:t>【特別企画】シークレットVIPラウンジ</a:t>
             </a:r>
             <a:br/>
             <a:r>
-              <a:t>(ヘッダー/フッターに導線なし)</a:t>
+              <a:t>(合言葉認証済みロイヤル顧客限定コンテンツ /secret-lounge)</a:t>
             </a:r>
           </a:p>
         </p:txBody>
@@ -5693,18 +5729,18 @@
         </p:nvSpPr>
         <p:spPr>
           <a:xfrm>
-            <a:off x="4937760" y="4937760"/>
-            <a:ext cx="5943600" cy="1097280"/>
+            <a:off x="6217920" y="4663440"/>
+            <a:ext cx="5120640" cy="1097280"/>
           </a:xfrm>
           <a:prstGeom prst="roundRect">
             <a:avLst/>
           </a:prstGeom>
           <a:solidFill>
-            <a:srgbClr val="FEF2F2"/>
+            <a:srgbClr val="F8FAFC"/>
           </a:solidFill>
-          <a:ln w="19050">
+          <a:ln w="12700">
             <a:solidFill>
-              <a:srgbClr val="EA580C"/>
+              <a:srgbClr val="E2E8F0"/>
             </a:solidFill>
           </a:ln>
         </p:spPr>
@@ -5727,18 +5763,18 @@
           <a:lstStyle/>
           <a:p>
             <a:pPr algn="ctr">
-              <a:defRPr sz="1100" b="1">
-                <a:solidFill>
-                  <a:srgbClr val="EA580C"/>
-                </a:solidFill>
-              </a:defRPr>
-            </a:pPr>
-            <a:r>
-              <a:t>【法的表記欠落】特定商取引法 / 利用規約</a:t>
+              <a:defRPr sz="1050" b="1">
+                <a:solidFill>
+                  <a:srgbClr val="0F172A"/>
+                </a:solidFill>
+              </a:defRPr>
+            </a:pPr>
+            <a:r>
+              <a:t>【コンプライアンス基盤】特定商取引法に基づく表記 / プライバシーポリシー / 利用規約</a:t>
             </a:r>
             <a:br/>
             <a:r>
-              <a:t>(導線ゼロ・テンプレURL直打ちのみ閲覧可能)</a:t>
+              <a:t>(全ページフッター共通導線整備)</a:t>
             </a:r>
           </a:p>
         </p:txBody>
@@ -5776,7 +5812,7 @@
             <a:avLst/>
           </a:prstGeom>
           <a:solidFill>
-            <a:srgbClr val="EA580C"/>
+            <a:srgbClr val="CA8A04"/>
           </a:solidFill>
           <a:ln>
             <a:noFill/>
@@ -5829,12 +5865,12 @@
             <a:pPr>
               <a:defRPr sz="1000" b="1">
                 <a:solidFill>
-                  <a:srgbClr val="EA580C"/>
-                </a:solidFill>
-              </a:defRPr>
-            </a:pPr>
-            <a:r>
-              <a:t>GONDAWARA TSUKUDANI DX PROJECT</a:t>
+                  <a:srgbClr val="CA8A04"/>
+                </a:solidFill>
+              </a:defRPr>
+            </a:pPr>
+            <a:r>
+              <a:t>STRATEGIC E-COMMERCE PROPOSAL</a:t>
             </a:r>
           </a:p>
           <a:p>
@@ -5846,7 +5882,7 @@
               </a:defRPr>
             </a:pPr>
             <a:r>
-              <a:t>ローンチまでの推進スケジュール（超突貫工程）</a:t>
+              <a:t>ローンチ推進スケジュール（最短市場投入アジャイル工程）</a:t>
             </a:r>
           </a:p>
         </p:txBody>
@@ -5859,14 +5895,14 @@
         </p:nvSpPr>
         <p:spPr>
           <a:xfrm>
-            <a:off x="731520" y="1645920"/>
-            <a:ext cx="2423160" cy="4114800"/>
+            <a:off x="731520" y="1463040"/>
+            <a:ext cx="2423160" cy="3931920"/>
           </a:xfrm>
           <a:prstGeom prst="roundRect">
             <a:avLst/>
           </a:prstGeom>
           <a:solidFill>
-            <a:srgbClr val="F1F5F9"/>
+            <a:srgbClr val="FFFFFF"/>
           </a:solidFill>
           <a:ln w="12700">
             <a:solidFill>
@@ -5904,8 +5940,8 @@
         </p:nvSpPr>
         <p:spPr>
           <a:xfrm>
-            <a:off x="914400" y="1828800"/>
-            <a:ext cx="2057400" cy="3749040"/>
+            <a:off x="914400" y="1645920"/>
+            <a:ext cx="2057400" cy="3566160"/>
           </a:xfrm>
           <a:prstGeom prst="rect">
             <a:avLst/>
@@ -5921,7 +5957,7 @@
             <a:pPr>
               <a:defRPr sz="1100" b="1">
                 <a:solidFill>
-                  <a:srgbClr val="EA580C"/>
+                  <a:srgbClr val="CA8A04"/>
                 </a:solidFill>
               </a:defRPr>
             </a:pPr>
@@ -5931,14 +5967,14 @@
           </a:p>
           <a:p>
             <a:pPr>
-              <a:defRPr sz="1400" b="1">
+              <a:defRPr sz="1300" b="1">
                 <a:solidFill>
                   <a:srgbClr val="0F172A"/>
                 </a:solidFill>
               </a:defRPr>
             </a:pPr>
             <a:r>
-              <a:t>Phase 1: 要件定義</a:t>
+              <a:t>Phase 1: 要件確定・設計FIX</a:t>
             </a:r>
           </a:p>
           <a:p>
@@ -5950,19 +5986,55 @@
               </a:defRPr>
             </a:pPr>
             <a:r>
-              <a:t>Day 1 (居酒屋)</a:t>
-            </a:r>
-          </a:p>
-          <a:p>
-            <a:pPr>
-              <a:defRPr sz="1050">
+              <a:t>Week 1</a:t>
+            </a:r>
+          </a:p>
+          <a:p>
+            <a:pPr>
+              <a:defRPr sz="950">
                 <a:solidFill>
                   <a:srgbClr val="0F172A"/>
                 </a:solidFill>
               </a:defRPr>
             </a:pPr>
             <a:r>
-              <a:t>店主とビールを飲みながら口頭で仕様決定。議事録なし。</a:t>
+              <a:t>・事業要件および画面ワイヤー確定</a:t>
+            </a:r>
+          </a:p>
+          <a:p>
+            <a:pPr>
+              <a:defRPr sz="950">
+                <a:solidFill>
+                  <a:srgbClr val="0F172A"/>
+                </a:solidFill>
+              </a:defRPr>
+            </a:pPr>
+            <a:r>
+              <a:t>・DB設計・商品マスタフォーマットFIX</a:t>
+            </a:r>
+          </a:p>
+          <a:p>
+            <a:pPr>
+              <a:defRPr sz="950">
+                <a:solidFill>
+                  <a:srgbClr val="0F172A"/>
+                </a:solidFill>
+              </a:defRPr>
+            </a:pPr>
+            <a:r>
+              <a:t>※貴社仕様検収期間: 1営業日設定</a:t>
+            </a:r>
+          </a:p>
+          <a:p>
+            <a:pPr>
+              <a:defRPr sz="950">
+                <a:solidFill>
+                  <a:srgbClr val="0F172A"/>
+                </a:solidFill>
+              </a:defRPr>
+            </a:pPr>
+            <a:r>
+              <a:t>※素材（画像・原稿）の即日支給前提</a:t>
             </a:r>
           </a:p>
         </p:txBody>
@@ -5975,14 +6047,14 @@
         </p:nvSpPr>
         <p:spPr>
           <a:xfrm>
-            <a:off x="3474720" y="1645920"/>
-            <a:ext cx="2423160" cy="4114800"/>
+            <a:off x="3474720" y="1463040"/>
+            <a:ext cx="2423160" cy="3931920"/>
           </a:xfrm>
           <a:prstGeom prst="roundRect">
             <a:avLst/>
           </a:prstGeom>
           <a:solidFill>
-            <a:srgbClr val="F1F5F9"/>
+            <a:srgbClr val="FFFFFF"/>
           </a:solidFill>
           <a:ln w="12700">
             <a:solidFill>
@@ -6020,8 +6092,8 @@
         </p:nvSpPr>
         <p:spPr>
           <a:xfrm>
-            <a:off x="3657600" y="1828800"/>
-            <a:ext cx="2057400" cy="3749040"/>
+            <a:off x="3657600" y="1645920"/>
+            <a:ext cx="2057400" cy="3566160"/>
           </a:xfrm>
           <a:prstGeom prst="rect">
             <a:avLst/>
@@ -6037,7 +6109,7 @@
             <a:pPr>
               <a:defRPr sz="1100" b="1">
                 <a:solidFill>
-                  <a:srgbClr val="EA580C"/>
+                  <a:srgbClr val="CA8A04"/>
                 </a:solidFill>
               </a:defRPr>
             </a:pPr>
@@ -6047,14 +6119,14 @@
           </a:p>
           <a:p>
             <a:pPr>
-              <a:defRPr sz="1400" b="1">
+              <a:defRPr sz="1300" b="1">
                 <a:solidFill>
                   <a:srgbClr val="0F172A"/>
                 </a:solidFill>
               </a:defRPr>
             </a:pPr>
             <a:r>
-              <a:t>Phase 2: 実装・コーディング</a:t>
+              <a:t>Phase 2: 実装・API連携</a:t>
             </a:r>
           </a:p>
           <a:p>
@@ -6066,19 +6138,55 @@
               </a:defRPr>
             </a:pPr>
             <a:r>
-              <a:t>Day 2 - Day 4</a:t>
-            </a:r>
-          </a:p>
-          <a:p>
-            <a:pPr>
-              <a:defRPr sz="1050">
+              <a:t>Week 2</a:t>
+            </a:r>
+          </a:p>
+          <a:p>
+            <a:pPr>
+              <a:defRPr sz="950">
                 <a:solidFill>
                   <a:srgbClr val="0F172A"/>
                 </a:solidFill>
               </a:defRPr>
             </a:pPr>
             <a:r>
-              <a:t>1500行の神コントローラに全処理を殴り書き。動けばヨシ！</a:t>
+              <a:t>・Laravelフレームワーク基盤構築</a:t>
+            </a:r>
+          </a:p>
+          <a:p>
+            <a:pPr>
+              <a:defRPr sz="950">
+                <a:solidFill>
+                  <a:srgbClr val="0F172A"/>
+                </a:solidFill>
+              </a:defRPr>
+            </a:pPr>
+            <a:r>
+              <a:t>・フロントUI実装・決済連携モック接続</a:t>
+            </a:r>
+          </a:p>
+          <a:p>
+            <a:pPr>
+              <a:defRPr sz="950">
+                <a:solidFill>
+                  <a:srgbClr val="0F172A"/>
+                </a:solidFill>
+              </a:defRPr>
+            </a:pPr>
+            <a:r>
+              <a:t>※並行開発によるリードタイム極小化</a:t>
+            </a:r>
+          </a:p>
+          <a:p>
+            <a:pPr>
+              <a:defRPr sz="950">
+                <a:solidFill>
+                  <a:srgbClr val="0F172A"/>
+                </a:solidFill>
+              </a:defRPr>
+            </a:pPr>
+            <a:r>
+              <a:t>※仕様追加・変更は原則凍結</a:t>
             </a:r>
           </a:p>
         </p:txBody>
@@ -6091,14 +6199,14 @@
         </p:nvSpPr>
         <p:spPr>
           <a:xfrm>
-            <a:off x="6217920" y="1645920"/>
-            <a:ext cx="2423160" cy="4114800"/>
+            <a:off x="6217920" y="1463040"/>
+            <a:ext cx="2423160" cy="3931920"/>
           </a:xfrm>
           <a:prstGeom prst="roundRect">
             <a:avLst/>
           </a:prstGeom>
           <a:solidFill>
-            <a:srgbClr val="F1F5F9"/>
+            <a:srgbClr val="FFFFFF"/>
           </a:solidFill>
           <a:ln w="12700">
             <a:solidFill>
@@ -6136,8 +6244,8 @@
         </p:nvSpPr>
         <p:spPr>
           <a:xfrm>
-            <a:off x="6400800" y="1828800"/>
-            <a:ext cx="2057400" cy="3749040"/>
+            <a:off x="6400800" y="1645920"/>
+            <a:ext cx="2057400" cy="3566160"/>
           </a:xfrm>
           <a:prstGeom prst="rect">
             <a:avLst/>
@@ -6153,7 +6261,7 @@
             <a:pPr>
               <a:defRPr sz="1100" b="1">
                 <a:solidFill>
-                  <a:srgbClr val="EA580C"/>
+                  <a:srgbClr val="CA8A04"/>
                 </a:solidFill>
               </a:defRPr>
             </a:pPr>
@@ -6163,14 +6271,14 @@
           </a:p>
           <a:p>
             <a:pPr>
-              <a:defRPr sz="1400" b="1">
+              <a:defRPr sz="1300" b="1">
                 <a:solidFill>
                   <a:srgbClr val="0F172A"/>
                 </a:solidFill>
               </a:defRPr>
             </a:pPr>
             <a:r>
-              <a:t>Phase 3: テスト・品質管理</a:t>
+              <a:t>Phase 3: 結合検証・受入検収</a:t>
             </a:r>
           </a:p>
           <a:p>
@@ -6182,19 +6290,55 @@
               </a:defRPr>
             </a:pPr>
             <a:r>
-              <a:t>Day 5 (1時間)</a:t>
-            </a:r>
-          </a:p>
-          <a:p>
-            <a:pPr>
-              <a:defRPr sz="1050">
+              <a:t>Week 3</a:t>
+            </a:r>
+          </a:p>
+          <a:p>
+            <a:pPr>
+              <a:defRPr sz="950">
                 <a:solidFill>
                   <a:srgbClr val="0F172A"/>
                 </a:solidFill>
               </a:defRPr>
             </a:pPr>
             <a:r>
-              <a:t>店主が自分のPCで1回カートに入れたら購入できたのでテスト完了。</a:t>
+              <a:t>・シナリオテスト・決済疎通確認</a:t>
+            </a:r>
+          </a:p>
+          <a:p>
+            <a:pPr>
+              <a:defRPr sz="950">
+                <a:solidFill>
+                  <a:srgbClr val="0F172A"/>
+                </a:solidFill>
+              </a:defRPr>
+            </a:pPr>
+            <a:r>
+              <a:t>・本番商品マスタデータ登録</a:t>
+            </a:r>
+          </a:p>
+          <a:p>
+            <a:pPr>
+              <a:defRPr sz="950">
+                <a:solidFill>
+                  <a:srgbClr val="0F172A"/>
+                </a:solidFill>
+              </a:defRPr>
+            </a:pPr>
+            <a:r>
+              <a:t>※貴社受入テスト(UAT)期間: 2営業日</a:t>
+            </a:r>
+          </a:p>
+          <a:p>
+            <a:pPr>
+              <a:defRPr sz="950">
+                <a:solidFill>
+                  <a:srgbClr val="0F172A"/>
+                </a:solidFill>
+              </a:defRPr>
+            </a:pPr>
+            <a:r>
+              <a:t>※軽微な微調整の反映完了</a:t>
             </a:r>
           </a:p>
         </p:txBody>
@@ -6207,14 +6351,14 @@
         </p:nvSpPr>
         <p:spPr>
           <a:xfrm>
-            <a:off x="8961120" y="1645920"/>
-            <a:ext cx="2423160" cy="4114800"/>
+            <a:off x="8961120" y="1463040"/>
+            <a:ext cx="2423160" cy="3931920"/>
           </a:xfrm>
           <a:prstGeom prst="roundRect">
             <a:avLst/>
           </a:prstGeom>
           <a:solidFill>
-            <a:srgbClr val="F1F5F9"/>
+            <a:srgbClr val="FFFFFF"/>
           </a:solidFill>
           <a:ln w="12700">
             <a:solidFill>
@@ -6252,8 +6396,8 @@
         </p:nvSpPr>
         <p:spPr>
           <a:xfrm>
-            <a:off x="9144000" y="1828800"/>
-            <a:ext cx="2057400" cy="3749040"/>
+            <a:off x="9144000" y="1645920"/>
+            <a:ext cx="2057400" cy="3566160"/>
           </a:xfrm>
           <a:prstGeom prst="rect">
             <a:avLst/>
@@ -6269,7 +6413,7 @@
             <a:pPr>
               <a:defRPr sz="1100" b="1">
                 <a:solidFill>
-                  <a:srgbClr val="EA580C"/>
+                  <a:srgbClr val="CA8A04"/>
                 </a:solidFill>
               </a:defRPr>
             </a:pPr>
@@ -6279,14 +6423,14 @@
           </a:p>
           <a:p>
             <a:pPr>
-              <a:defRPr sz="1400" b="1">
+              <a:defRPr sz="1300" b="1">
                 <a:solidFill>
                   <a:srgbClr val="0F172A"/>
                 </a:solidFill>
               </a:defRPr>
             </a:pPr>
             <a:r>
-              <a:t>Phase 4: 本番ローンチ</a:t>
+              <a:t>Phase 4: 本番移行・OPEN</a:t>
             </a:r>
           </a:p>
           <a:p>
@@ -6298,19 +6442,102 @@
               </a:defRPr>
             </a:pPr>
             <a:r>
-              <a:t>Day 6 (大安)</a:t>
-            </a:r>
-          </a:p>
-          <a:p>
-            <a:pPr>
-              <a:defRPr sz="1050">
+              <a:t>Week 4</a:t>
+            </a:r>
+          </a:p>
+          <a:p>
+            <a:pPr>
+              <a:defRPr sz="950">
                 <a:solidFill>
                   <a:srgbClr val="0F172A"/>
                 </a:solidFill>
               </a:defRPr>
             </a:pPr>
             <a:r>
-              <a:t>本番デバッグモード(APP_DEBUG=true)のまま奇跡の公開！</a:t>
+              <a:t>・DNS切り替え・SSL証明書適用</a:t>
+            </a:r>
+          </a:p>
+          <a:p>
+            <a:pPr>
+              <a:defRPr sz="950">
+                <a:solidFill>
+                  <a:srgbClr val="0F172A"/>
+                </a:solidFill>
+              </a:defRPr>
+            </a:pPr>
+            <a:r>
+              <a:t>・本番決済稼働確認・大安吉日公開</a:t>
+            </a:r>
+          </a:p>
+          <a:p>
+            <a:pPr>
+              <a:defRPr sz="950">
+                <a:solidFill>
+                  <a:srgbClr val="0F172A"/>
+                </a:solidFill>
+              </a:defRPr>
+            </a:pPr>
+            <a:r>
+              <a:t>※運用開始および初期監視</a:t>
+            </a:r>
+          </a:p>
+          <a:p>
+            <a:pPr>
+              <a:defRPr sz="950">
+                <a:solidFill>
+                  <a:srgbClr val="0F172A"/>
+                </a:solidFill>
+              </a:defRPr>
+            </a:pPr>
+            <a:r>
+              <a:t>※初期改善イテレーションへ移行</a:t>
+            </a:r>
+          </a:p>
+        </p:txBody>
+      </p:sp>
+      <p:sp>
+        <p:nvSpPr>
+          <p:cNvPr id="12" name="TextBox 11"/>
+          <p:cNvSpPr txBox="1"/>
+          <p:nvPr/>
+        </p:nvSpPr>
+        <p:spPr>
+          <a:xfrm>
+            <a:off x="731520" y="5577840"/>
+            <a:ext cx="10728655" cy="822960"/>
+          </a:xfrm>
+          <a:prstGeom prst="rect">
+            <a:avLst/>
+          </a:prstGeom>
+          <a:noFill/>
+        </p:spPr>
+        <p:txBody>
+          <a:bodyPr wrap="square">
+            <a:spAutoFit/>
+          </a:bodyPr>
+          <a:lstStyle/>
+          <a:p>
+            <a:pPr>
+              <a:defRPr sz="950" b="1">
+                <a:solidFill>
+                  <a:srgbClr val="475569"/>
+                </a:solidFill>
+              </a:defRPr>
+            </a:pPr>
+            <a:r>
+              <a:t>【推進上の前提事項およびリスクヘッジ条項】</a:t>
+            </a:r>
+          </a:p>
+          <a:p>
+            <a:pPr>
+              <a:defRPr sz="900">
+                <a:solidFill>
+                  <a:srgbClr val="475569"/>
+                </a:solidFill>
+              </a:defRPr>
+            </a:pPr>
+            <a:r>
+              <a:t>※本スケジュールは最短での市場投入を達成するため、各工程における貴社ご判断および素材提供を「即日」頂戴することを前提とした高効率アジャイル工程となっております。各社審査（クレジットカード等決済代行会社）の所要日数により、一部決済手段の稼働開始がリリース以降順次となる場合がございます。</a:t>
             </a:r>
           </a:p>
         </p:txBody>
